--- a/tools/FreeP.RenderCompare/corpus/08-effects.pptx
+++ b/tools/FreeP.RenderCompare/corpus/08-effects.pptx
@@ -129,7 +129,7 @@
           <p:cNvPr id="2" name="Title 1">
             <a:extLst>
               <a:ext uri="{FF2B5EF4-FFF2-40B4-BE49-F238E27FC236}">
-                <a16:creationId xmlns:a16="http://schemas.microsoft.com/office/drawing/2014/main" id="{802D32E0-C8C9-DF66-325D-563F1AB08F73}"/>
+                <a16:creationId xmlns:a16="http://schemas.microsoft.com/office/drawing/2014/main" id="{D58105B1-CE33-DF3F-E69F-540583ECBD06}"/>
               </a:ext>
             </a:extLst>
           </p:cNvPr>
@@ -166,7 +166,7 @@
           <p:cNvPr id="3" name="Subtitle 2">
             <a:extLst>
               <a:ext uri="{FF2B5EF4-FFF2-40B4-BE49-F238E27FC236}">
-                <a16:creationId xmlns:a16="http://schemas.microsoft.com/office/drawing/2014/main" id="{18CB1E65-FF13-7CAB-506E-68F4BFAEDF55}"/>
+                <a16:creationId xmlns:a16="http://schemas.microsoft.com/office/drawing/2014/main" id="{6C4D64B2-748E-1EAF-6770-FB25BC8CD322}"/>
               </a:ext>
             </a:extLst>
           </p:cNvPr>
@@ -236,7 +236,7 @@
           <p:cNvPr id="4" name="Date Placeholder 3">
             <a:extLst>
               <a:ext uri="{FF2B5EF4-FFF2-40B4-BE49-F238E27FC236}">
-                <a16:creationId xmlns:a16="http://schemas.microsoft.com/office/drawing/2014/main" id="{3E9874AC-55E7-B380-67A8-EAA6EF97AE69}"/>
+                <a16:creationId xmlns:a16="http://schemas.microsoft.com/office/drawing/2014/main" id="{CD900B3C-093C-916C-428B-35297533502B}"/>
               </a:ext>
             </a:extLst>
           </p:cNvPr>
@@ -252,7 +252,7 @@
           <a:bodyPr/>
           <a:lstStyle/>
           <a:p>
-            <a:fld id="{3E5093B9-90E3-4789-AE9C-479084660FBB}" type="datetimeFigureOut">
+            <a:fld id="{4952CEEE-4057-484F-A4D6-1563321FC9E5}" type="datetimeFigureOut">
               <a:rPr lang="en-US" smtClean="0"/>
               <a:t>6/26/2026</a:t>
             </a:fld>
@@ -265,7 +265,7 @@
           <p:cNvPr id="5" name="Footer Placeholder 4">
             <a:extLst>
               <a:ext uri="{FF2B5EF4-FFF2-40B4-BE49-F238E27FC236}">
-                <a16:creationId xmlns:a16="http://schemas.microsoft.com/office/drawing/2014/main" id="{10A906E3-2E67-0369-5F2B-207D80979A3E}"/>
+                <a16:creationId xmlns:a16="http://schemas.microsoft.com/office/drawing/2014/main" id="{2CD076CB-EED1-10AE-70CD-9BAF5BD9A225}"/>
               </a:ext>
             </a:extLst>
           </p:cNvPr>
@@ -290,7 +290,7 @@
           <p:cNvPr id="6" name="Slide Number Placeholder 5">
             <a:extLst>
               <a:ext uri="{FF2B5EF4-FFF2-40B4-BE49-F238E27FC236}">
-                <a16:creationId xmlns:a16="http://schemas.microsoft.com/office/drawing/2014/main" id="{745E0C93-13A1-A30C-1C14-6F4F206E4DF9}"/>
+                <a16:creationId xmlns:a16="http://schemas.microsoft.com/office/drawing/2014/main" id="{58BE701B-F422-844F-300F-3325218C8299}"/>
               </a:ext>
             </a:extLst>
           </p:cNvPr>
@@ -306,7 +306,7 @@
           <a:bodyPr/>
           <a:lstStyle/>
           <a:p>
-            <a:fld id="{A6897E97-FCE4-4795-9D7F-F982D9319847}" type="slidenum">
+            <a:fld id="{99638845-3555-49A7-8B29-F1FDEDD11D6C}" type="slidenum">
               <a:rPr lang="en-US" smtClean="0"/>
               <a:t>‹#›</a:t>
             </a:fld>
@@ -317,7 +317,7 @@
     </p:spTree>
     <p:extLst>
       <p:ext uri="{BB962C8B-B14F-4D97-AF65-F5344CB8AC3E}">
-        <p14:creationId xmlns:p14="http://schemas.microsoft.com/office/powerpoint/2010/main" val="3603764585"/>
+        <p14:creationId xmlns:p14="http://schemas.microsoft.com/office/powerpoint/2010/main" val="2741636129"/>
       </p:ext>
     </p:extLst>
   </p:cSld>
@@ -349,7 +349,7 @@
           <p:cNvPr id="2" name="Title 1">
             <a:extLst>
               <a:ext uri="{FF2B5EF4-FFF2-40B4-BE49-F238E27FC236}">
-                <a16:creationId xmlns:a16="http://schemas.microsoft.com/office/drawing/2014/main" id="{6D8736B5-2DE1-DF8F-B62D-C32953E591BD}"/>
+                <a16:creationId xmlns:a16="http://schemas.microsoft.com/office/drawing/2014/main" id="{C2D8CD2E-48EA-6C05-69AA-4C84FDE7D4D9}"/>
               </a:ext>
             </a:extLst>
           </p:cNvPr>
@@ -377,7 +377,7 @@
           <p:cNvPr id="3" name="Vertical Text Placeholder 2">
             <a:extLst>
               <a:ext uri="{FF2B5EF4-FFF2-40B4-BE49-F238E27FC236}">
-                <a16:creationId xmlns:a16="http://schemas.microsoft.com/office/drawing/2014/main" id="{AA5FAFA6-F737-17DA-B374-251DC625CFEE}"/>
+                <a16:creationId xmlns:a16="http://schemas.microsoft.com/office/drawing/2014/main" id="{72E6437D-B975-11D8-B3D6-45496F82D517}"/>
               </a:ext>
             </a:extLst>
           </p:cNvPr>
@@ -434,7 +434,7 @@
           <p:cNvPr id="4" name="Date Placeholder 3">
             <a:extLst>
               <a:ext uri="{FF2B5EF4-FFF2-40B4-BE49-F238E27FC236}">
-                <a16:creationId xmlns:a16="http://schemas.microsoft.com/office/drawing/2014/main" id="{77AE488A-BC61-270E-1AAB-FC44E10CBEDF}"/>
+                <a16:creationId xmlns:a16="http://schemas.microsoft.com/office/drawing/2014/main" id="{FBAE0B35-5B6A-AE60-C8CA-55B6B5CFB35F}"/>
               </a:ext>
             </a:extLst>
           </p:cNvPr>
@@ -450,7 +450,7 @@
           <a:bodyPr/>
           <a:lstStyle/>
           <a:p>
-            <a:fld id="{3E5093B9-90E3-4789-AE9C-479084660FBB}" type="datetimeFigureOut">
+            <a:fld id="{4952CEEE-4057-484F-A4D6-1563321FC9E5}" type="datetimeFigureOut">
               <a:rPr lang="en-US" smtClean="0"/>
               <a:t>6/26/2026</a:t>
             </a:fld>
@@ -463,7 +463,7 @@
           <p:cNvPr id="5" name="Footer Placeholder 4">
             <a:extLst>
               <a:ext uri="{FF2B5EF4-FFF2-40B4-BE49-F238E27FC236}">
-                <a16:creationId xmlns:a16="http://schemas.microsoft.com/office/drawing/2014/main" id="{2B3E75C9-8A18-6BEA-EE18-DE3D3BB4D8DF}"/>
+                <a16:creationId xmlns:a16="http://schemas.microsoft.com/office/drawing/2014/main" id="{9B3B3394-0DC8-F047-F382-EF6B187CAFF1}"/>
               </a:ext>
             </a:extLst>
           </p:cNvPr>
@@ -488,7 +488,7 @@
           <p:cNvPr id="6" name="Slide Number Placeholder 5">
             <a:extLst>
               <a:ext uri="{FF2B5EF4-FFF2-40B4-BE49-F238E27FC236}">
-                <a16:creationId xmlns:a16="http://schemas.microsoft.com/office/drawing/2014/main" id="{B1E2E0B2-6420-BDC8-DE89-0D9C2DEDE70F}"/>
+                <a16:creationId xmlns:a16="http://schemas.microsoft.com/office/drawing/2014/main" id="{70D0F951-EE9F-5B2A-E6CA-75AE834764F7}"/>
               </a:ext>
             </a:extLst>
           </p:cNvPr>
@@ -504,7 +504,7 @@
           <a:bodyPr/>
           <a:lstStyle/>
           <a:p>
-            <a:fld id="{A6897E97-FCE4-4795-9D7F-F982D9319847}" type="slidenum">
+            <a:fld id="{99638845-3555-49A7-8B29-F1FDEDD11D6C}" type="slidenum">
               <a:rPr lang="en-US" smtClean="0"/>
               <a:t>‹#›</a:t>
             </a:fld>
@@ -515,7 +515,7 @@
     </p:spTree>
     <p:extLst>
       <p:ext uri="{BB962C8B-B14F-4D97-AF65-F5344CB8AC3E}">
-        <p14:creationId xmlns:p14="http://schemas.microsoft.com/office/powerpoint/2010/main" val="1097536202"/>
+        <p14:creationId xmlns:p14="http://schemas.microsoft.com/office/powerpoint/2010/main" val="3238304786"/>
       </p:ext>
     </p:extLst>
   </p:cSld>
@@ -547,7 +547,7 @@
           <p:cNvPr id="2" name="Vertical Title 1">
             <a:extLst>
               <a:ext uri="{FF2B5EF4-FFF2-40B4-BE49-F238E27FC236}">
-                <a16:creationId xmlns:a16="http://schemas.microsoft.com/office/drawing/2014/main" id="{6B89F206-9F1D-CD85-6455-5E6E4D2E6152}"/>
+                <a16:creationId xmlns:a16="http://schemas.microsoft.com/office/drawing/2014/main" id="{A4B940C3-2A64-9D7F-7230-97E7B438C0DB}"/>
               </a:ext>
             </a:extLst>
           </p:cNvPr>
@@ -580,7 +580,7 @@
           <p:cNvPr id="3" name="Vertical Text Placeholder 2">
             <a:extLst>
               <a:ext uri="{FF2B5EF4-FFF2-40B4-BE49-F238E27FC236}">
-                <a16:creationId xmlns:a16="http://schemas.microsoft.com/office/drawing/2014/main" id="{70794AE0-EBAA-C012-DF3F-BFA35BC9A573}"/>
+                <a16:creationId xmlns:a16="http://schemas.microsoft.com/office/drawing/2014/main" id="{6E313542-6A1B-E539-2D15-9612B1C2A32D}"/>
               </a:ext>
             </a:extLst>
           </p:cNvPr>
@@ -642,7 +642,7 @@
           <p:cNvPr id="4" name="Date Placeholder 3">
             <a:extLst>
               <a:ext uri="{FF2B5EF4-FFF2-40B4-BE49-F238E27FC236}">
-                <a16:creationId xmlns:a16="http://schemas.microsoft.com/office/drawing/2014/main" id="{44B1EA59-2624-81A7-24AF-0D853BA775FF}"/>
+                <a16:creationId xmlns:a16="http://schemas.microsoft.com/office/drawing/2014/main" id="{17CA0062-B944-397C-EDF0-B026F9FD8397}"/>
               </a:ext>
             </a:extLst>
           </p:cNvPr>
@@ -658,7 +658,7 @@
           <a:bodyPr/>
           <a:lstStyle/>
           <a:p>
-            <a:fld id="{3E5093B9-90E3-4789-AE9C-479084660FBB}" type="datetimeFigureOut">
+            <a:fld id="{4952CEEE-4057-484F-A4D6-1563321FC9E5}" type="datetimeFigureOut">
               <a:rPr lang="en-US" smtClean="0"/>
               <a:t>6/26/2026</a:t>
             </a:fld>
@@ -671,7 +671,7 @@
           <p:cNvPr id="5" name="Footer Placeholder 4">
             <a:extLst>
               <a:ext uri="{FF2B5EF4-FFF2-40B4-BE49-F238E27FC236}">
-                <a16:creationId xmlns:a16="http://schemas.microsoft.com/office/drawing/2014/main" id="{BEC28C68-B154-19DA-EB3F-194C69671568}"/>
+                <a16:creationId xmlns:a16="http://schemas.microsoft.com/office/drawing/2014/main" id="{5CD3E27C-2B10-2C55-A8CC-C1FD927D2FD8}"/>
               </a:ext>
             </a:extLst>
           </p:cNvPr>
@@ -696,7 +696,7 @@
           <p:cNvPr id="6" name="Slide Number Placeholder 5">
             <a:extLst>
               <a:ext uri="{FF2B5EF4-FFF2-40B4-BE49-F238E27FC236}">
-                <a16:creationId xmlns:a16="http://schemas.microsoft.com/office/drawing/2014/main" id="{610F2C12-B18E-6EB5-3D40-AAF18CE7CB8F}"/>
+                <a16:creationId xmlns:a16="http://schemas.microsoft.com/office/drawing/2014/main" id="{C9B2D508-EB44-0D4A-1891-205377C87DDD}"/>
               </a:ext>
             </a:extLst>
           </p:cNvPr>
@@ -712,7 +712,7 @@
           <a:bodyPr/>
           <a:lstStyle/>
           <a:p>
-            <a:fld id="{A6897E97-FCE4-4795-9D7F-F982D9319847}" type="slidenum">
+            <a:fld id="{99638845-3555-49A7-8B29-F1FDEDD11D6C}" type="slidenum">
               <a:rPr lang="en-US" smtClean="0"/>
               <a:t>‹#›</a:t>
             </a:fld>
@@ -723,7 +723,7 @@
     </p:spTree>
     <p:extLst>
       <p:ext uri="{BB962C8B-B14F-4D97-AF65-F5344CB8AC3E}">
-        <p14:creationId xmlns:p14="http://schemas.microsoft.com/office/powerpoint/2010/main" val="1488571260"/>
+        <p14:creationId xmlns:p14="http://schemas.microsoft.com/office/powerpoint/2010/main" val="1000427833"/>
       </p:ext>
     </p:extLst>
   </p:cSld>
@@ -755,7 +755,7 @@
           <p:cNvPr id="2" name="Title 1">
             <a:extLst>
               <a:ext uri="{FF2B5EF4-FFF2-40B4-BE49-F238E27FC236}">
-                <a16:creationId xmlns:a16="http://schemas.microsoft.com/office/drawing/2014/main" id="{8A0A063A-B3E5-3125-F598-43085280472F}"/>
+                <a16:creationId xmlns:a16="http://schemas.microsoft.com/office/drawing/2014/main" id="{D37CA1B0-EDD0-00E2-6776-D2A4E498401E}"/>
               </a:ext>
             </a:extLst>
           </p:cNvPr>
@@ -783,7 +783,7 @@
           <p:cNvPr id="3" name="Content Placeholder 2">
             <a:extLst>
               <a:ext uri="{FF2B5EF4-FFF2-40B4-BE49-F238E27FC236}">
-                <a16:creationId xmlns:a16="http://schemas.microsoft.com/office/drawing/2014/main" id="{F8451A3A-F1C5-4388-ED9A-820252E34DB5}"/>
+                <a16:creationId xmlns:a16="http://schemas.microsoft.com/office/drawing/2014/main" id="{1C324318-22A7-B260-5CCC-31A0D63AD8FD}"/>
               </a:ext>
             </a:extLst>
           </p:cNvPr>
@@ -840,7 +840,7 @@
           <p:cNvPr id="4" name="Date Placeholder 3">
             <a:extLst>
               <a:ext uri="{FF2B5EF4-FFF2-40B4-BE49-F238E27FC236}">
-                <a16:creationId xmlns:a16="http://schemas.microsoft.com/office/drawing/2014/main" id="{CEFF5DA1-2F7D-E08B-3937-D54433E689A9}"/>
+                <a16:creationId xmlns:a16="http://schemas.microsoft.com/office/drawing/2014/main" id="{CD2172D2-D012-906D-100B-F0D15D267498}"/>
               </a:ext>
             </a:extLst>
           </p:cNvPr>
@@ -856,7 +856,7 @@
           <a:bodyPr/>
           <a:lstStyle/>
           <a:p>
-            <a:fld id="{3E5093B9-90E3-4789-AE9C-479084660FBB}" type="datetimeFigureOut">
+            <a:fld id="{4952CEEE-4057-484F-A4D6-1563321FC9E5}" type="datetimeFigureOut">
               <a:rPr lang="en-US" smtClean="0"/>
               <a:t>6/26/2026</a:t>
             </a:fld>
@@ -869,7 +869,7 @@
           <p:cNvPr id="5" name="Footer Placeholder 4">
             <a:extLst>
               <a:ext uri="{FF2B5EF4-FFF2-40B4-BE49-F238E27FC236}">
-                <a16:creationId xmlns:a16="http://schemas.microsoft.com/office/drawing/2014/main" id="{D578438C-076C-1D53-8A8A-E559B7446902}"/>
+                <a16:creationId xmlns:a16="http://schemas.microsoft.com/office/drawing/2014/main" id="{9878E6AF-1BFF-821A-06E4-058432D447CF}"/>
               </a:ext>
             </a:extLst>
           </p:cNvPr>
@@ -894,7 +894,7 @@
           <p:cNvPr id="6" name="Slide Number Placeholder 5">
             <a:extLst>
               <a:ext uri="{FF2B5EF4-FFF2-40B4-BE49-F238E27FC236}">
-                <a16:creationId xmlns:a16="http://schemas.microsoft.com/office/drawing/2014/main" id="{0B57373F-A452-89C3-F064-D698FBE6B97D}"/>
+                <a16:creationId xmlns:a16="http://schemas.microsoft.com/office/drawing/2014/main" id="{BC0D9D2E-13EE-CCED-1342-36E44F9DC60E}"/>
               </a:ext>
             </a:extLst>
           </p:cNvPr>
@@ -910,7 +910,7 @@
           <a:bodyPr/>
           <a:lstStyle/>
           <a:p>
-            <a:fld id="{A6897E97-FCE4-4795-9D7F-F982D9319847}" type="slidenum">
+            <a:fld id="{99638845-3555-49A7-8B29-F1FDEDD11D6C}" type="slidenum">
               <a:rPr lang="en-US" smtClean="0"/>
               <a:t>‹#›</a:t>
             </a:fld>
@@ -921,7 +921,7 @@
     </p:spTree>
     <p:extLst>
       <p:ext uri="{BB962C8B-B14F-4D97-AF65-F5344CB8AC3E}">
-        <p14:creationId xmlns:p14="http://schemas.microsoft.com/office/powerpoint/2010/main" val="1790450295"/>
+        <p14:creationId xmlns:p14="http://schemas.microsoft.com/office/powerpoint/2010/main" val="3613151070"/>
       </p:ext>
     </p:extLst>
   </p:cSld>
@@ -953,7 +953,7 @@
           <p:cNvPr id="2" name="Title 1">
             <a:extLst>
               <a:ext uri="{FF2B5EF4-FFF2-40B4-BE49-F238E27FC236}">
-                <a16:creationId xmlns:a16="http://schemas.microsoft.com/office/drawing/2014/main" id="{81EBDD6A-EFB9-3C1D-38B5-FE72F3672975}"/>
+                <a16:creationId xmlns:a16="http://schemas.microsoft.com/office/drawing/2014/main" id="{DC7ED9C0-38DD-43A8-022C-F3E69564CB2F}"/>
               </a:ext>
             </a:extLst>
           </p:cNvPr>
@@ -990,7 +990,7 @@
           <p:cNvPr id="3" name="Text Placeholder 2">
             <a:extLst>
               <a:ext uri="{FF2B5EF4-FFF2-40B4-BE49-F238E27FC236}">
-                <a16:creationId xmlns:a16="http://schemas.microsoft.com/office/drawing/2014/main" id="{D1FE6FA1-35BA-E4BB-97FB-37A5F3C9BF12}"/>
+                <a16:creationId xmlns:a16="http://schemas.microsoft.com/office/drawing/2014/main" id="{F634A4DC-3003-EC3D-6D0C-452584E96A94}"/>
               </a:ext>
             </a:extLst>
           </p:cNvPr>
@@ -1115,7 +1115,7 @@
           <p:cNvPr id="4" name="Date Placeholder 3">
             <a:extLst>
               <a:ext uri="{FF2B5EF4-FFF2-40B4-BE49-F238E27FC236}">
-                <a16:creationId xmlns:a16="http://schemas.microsoft.com/office/drawing/2014/main" id="{A7111957-E399-20A6-519E-40B1471751AA}"/>
+                <a16:creationId xmlns:a16="http://schemas.microsoft.com/office/drawing/2014/main" id="{CEA217BA-E50A-C9F0-1FFE-0D6AA40D850E}"/>
               </a:ext>
             </a:extLst>
           </p:cNvPr>
@@ -1131,7 +1131,7 @@
           <a:bodyPr/>
           <a:lstStyle/>
           <a:p>
-            <a:fld id="{3E5093B9-90E3-4789-AE9C-479084660FBB}" type="datetimeFigureOut">
+            <a:fld id="{4952CEEE-4057-484F-A4D6-1563321FC9E5}" type="datetimeFigureOut">
               <a:rPr lang="en-US" smtClean="0"/>
               <a:t>6/26/2026</a:t>
             </a:fld>
@@ -1144,7 +1144,7 @@
           <p:cNvPr id="5" name="Footer Placeholder 4">
             <a:extLst>
               <a:ext uri="{FF2B5EF4-FFF2-40B4-BE49-F238E27FC236}">
-                <a16:creationId xmlns:a16="http://schemas.microsoft.com/office/drawing/2014/main" id="{57446111-1FAF-BF7D-AC03-72DDCE61D25E}"/>
+                <a16:creationId xmlns:a16="http://schemas.microsoft.com/office/drawing/2014/main" id="{085D8D2E-05CD-340E-EA42-C1D788A781DD}"/>
               </a:ext>
             </a:extLst>
           </p:cNvPr>
@@ -1169,7 +1169,7 @@
           <p:cNvPr id="6" name="Slide Number Placeholder 5">
             <a:extLst>
               <a:ext uri="{FF2B5EF4-FFF2-40B4-BE49-F238E27FC236}">
-                <a16:creationId xmlns:a16="http://schemas.microsoft.com/office/drawing/2014/main" id="{18CEFC5E-5A23-7C1D-0FEB-BEAEEF52B460}"/>
+                <a16:creationId xmlns:a16="http://schemas.microsoft.com/office/drawing/2014/main" id="{00612784-81AC-EC06-F41C-66BFC09768A5}"/>
               </a:ext>
             </a:extLst>
           </p:cNvPr>
@@ -1185,7 +1185,7 @@
           <a:bodyPr/>
           <a:lstStyle/>
           <a:p>
-            <a:fld id="{A6897E97-FCE4-4795-9D7F-F982D9319847}" type="slidenum">
+            <a:fld id="{99638845-3555-49A7-8B29-F1FDEDD11D6C}" type="slidenum">
               <a:rPr lang="en-US" smtClean="0"/>
               <a:t>‹#›</a:t>
             </a:fld>
@@ -1196,7 +1196,7 @@
     </p:spTree>
     <p:extLst>
       <p:ext uri="{BB962C8B-B14F-4D97-AF65-F5344CB8AC3E}">
-        <p14:creationId xmlns:p14="http://schemas.microsoft.com/office/powerpoint/2010/main" val="2614229272"/>
+        <p14:creationId xmlns:p14="http://schemas.microsoft.com/office/powerpoint/2010/main" val="691374337"/>
       </p:ext>
     </p:extLst>
   </p:cSld>
@@ -1228,7 +1228,7 @@
           <p:cNvPr id="2" name="Title 1">
             <a:extLst>
               <a:ext uri="{FF2B5EF4-FFF2-40B4-BE49-F238E27FC236}">
-                <a16:creationId xmlns:a16="http://schemas.microsoft.com/office/drawing/2014/main" id="{2795D7BB-839D-763B-72CC-BD48E3C6529C}"/>
+                <a16:creationId xmlns:a16="http://schemas.microsoft.com/office/drawing/2014/main" id="{26EEF2E8-8614-8D84-54B2-FCB9A718D7F3}"/>
               </a:ext>
             </a:extLst>
           </p:cNvPr>
@@ -1256,7 +1256,7 @@
           <p:cNvPr id="3" name="Content Placeholder 2">
             <a:extLst>
               <a:ext uri="{FF2B5EF4-FFF2-40B4-BE49-F238E27FC236}">
-                <a16:creationId xmlns:a16="http://schemas.microsoft.com/office/drawing/2014/main" id="{F69FFBB4-0263-C2FF-4566-3280D1F649D2}"/>
+                <a16:creationId xmlns:a16="http://schemas.microsoft.com/office/drawing/2014/main" id="{1C0D168A-3DDC-4FF0-1AE4-35AADC4D7BC7}"/>
               </a:ext>
             </a:extLst>
           </p:cNvPr>
@@ -1318,7 +1318,7 @@
           <p:cNvPr id="4" name="Content Placeholder 3">
             <a:extLst>
               <a:ext uri="{FF2B5EF4-FFF2-40B4-BE49-F238E27FC236}">
-                <a16:creationId xmlns:a16="http://schemas.microsoft.com/office/drawing/2014/main" id="{FF33D86E-3EB9-C929-5831-DFFC02E3F3E8}"/>
+                <a16:creationId xmlns:a16="http://schemas.microsoft.com/office/drawing/2014/main" id="{87E42C45-477F-1256-4438-99C901A57D7D}"/>
               </a:ext>
             </a:extLst>
           </p:cNvPr>
@@ -1380,7 +1380,7 @@
           <p:cNvPr id="5" name="Date Placeholder 4">
             <a:extLst>
               <a:ext uri="{FF2B5EF4-FFF2-40B4-BE49-F238E27FC236}">
-                <a16:creationId xmlns:a16="http://schemas.microsoft.com/office/drawing/2014/main" id="{4DB47B0E-F8DE-AE0E-F2C4-90FC88DC1A31}"/>
+                <a16:creationId xmlns:a16="http://schemas.microsoft.com/office/drawing/2014/main" id="{F62AC0BA-3646-3992-AB63-804EBF7917B2}"/>
               </a:ext>
             </a:extLst>
           </p:cNvPr>
@@ -1396,7 +1396,7 @@
           <a:bodyPr/>
           <a:lstStyle/>
           <a:p>
-            <a:fld id="{3E5093B9-90E3-4789-AE9C-479084660FBB}" type="datetimeFigureOut">
+            <a:fld id="{4952CEEE-4057-484F-A4D6-1563321FC9E5}" type="datetimeFigureOut">
               <a:rPr lang="en-US" smtClean="0"/>
               <a:t>6/26/2026</a:t>
             </a:fld>
@@ -1409,7 +1409,7 @@
           <p:cNvPr id="6" name="Footer Placeholder 5">
             <a:extLst>
               <a:ext uri="{FF2B5EF4-FFF2-40B4-BE49-F238E27FC236}">
-                <a16:creationId xmlns:a16="http://schemas.microsoft.com/office/drawing/2014/main" id="{BD7324F7-A850-62BC-47F9-755E942C8CA1}"/>
+                <a16:creationId xmlns:a16="http://schemas.microsoft.com/office/drawing/2014/main" id="{A6B7AE20-387D-8080-F73C-4AEB7F1B321D}"/>
               </a:ext>
             </a:extLst>
           </p:cNvPr>
@@ -1434,7 +1434,7 @@
           <p:cNvPr id="7" name="Slide Number Placeholder 6">
             <a:extLst>
               <a:ext uri="{FF2B5EF4-FFF2-40B4-BE49-F238E27FC236}">
-                <a16:creationId xmlns:a16="http://schemas.microsoft.com/office/drawing/2014/main" id="{5C2A3378-0A65-9E40-9E1E-75A10EC0457E}"/>
+                <a16:creationId xmlns:a16="http://schemas.microsoft.com/office/drawing/2014/main" id="{C9CFF53E-FF07-56BA-FF8D-9B8492AC3BA4}"/>
               </a:ext>
             </a:extLst>
           </p:cNvPr>
@@ -1450,7 +1450,7 @@
           <a:bodyPr/>
           <a:lstStyle/>
           <a:p>
-            <a:fld id="{A6897E97-FCE4-4795-9D7F-F982D9319847}" type="slidenum">
+            <a:fld id="{99638845-3555-49A7-8B29-F1FDEDD11D6C}" type="slidenum">
               <a:rPr lang="en-US" smtClean="0"/>
               <a:t>‹#›</a:t>
             </a:fld>
@@ -1461,7 +1461,7 @@
     </p:spTree>
     <p:extLst>
       <p:ext uri="{BB962C8B-B14F-4D97-AF65-F5344CB8AC3E}">
-        <p14:creationId xmlns:p14="http://schemas.microsoft.com/office/powerpoint/2010/main" val="932520221"/>
+        <p14:creationId xmlns:p14="http://schemas.microsoft.com/office/powerpoint/2010/main" val="3683697418"/>
       </p:ext>
     </p:extLst>
   </p:cSld>
@@ -1493,7 +1493,7 @@
           <p:cNvPr id="2" name="Title 1">
             <a:extLst>
               <a:ext uri="{FF2B5EF4-FFF2-40B4-BE49-F238E27FC236}">
-                <a16:creationId xmlns:a16="http://schemas.microsoft.com/office/drawing/2014/main" id="{6E809207-B6AD-4485-FDBE-E8B0ADA77F32}"/>
+                <a16:creationId xmlns:a16="http://schemas.microsoft.com/office/drawing/2014/main" id="{1B59A4C5-1577-2ABD-ECE4-D9429E36E0A1}"/>
               </a:ext>
             </a:extLst>
           </p:cNvPr>
@@ -1526,7 +1526,7 @@
           <p:cNvPr id="3" name="Text Placeholder 2">
             <a:extLst>
               <a:ext uri="{FF2B5EF4-FFF2-40B4-BE49-F238E27FC236}">
-                <a16:creationId xmlns:a16="http://schemas.microsoft.com/office/drawing/2014/main" id="{F16CEF1F-C733-BDAA-94A3-7935E0E6E850}"/>
+                <a16:creationId xmlns:a16="http://schemas.microsoft.com/office/drawing/2014/main" id="{EF884508-ED25-272F-048F-57297CF744B3}"/>
               </a:ext>
             </a:extLst>
           </p:cNvPr>
@@ -1597,7 +1597,7 @@
           <p:cNvPr id="4" name="Content Placeholder 3">
             <a:extLst>
               <a:ext uri="{FF2B5EF4-FFF2-40B4-BE49-F238E27FC236}">
-                <a16:creationId xmlns:a16="http://schemas.microsoft.com/office/drawing/2014/main" id="{5C4F47B0-2529-EDC4-CAF6-93F297DFEE1F}"/>
+                <a16:creationId xmlns:a16="http://schemas.microsoft.com/office/drawing/2014/main" id="{172E15D0-8BA7-225E-79C8-578FB7B13AF0}"/>
               </a:ext>
             </a:extLst>
           </p:cNvPr>
@@ -1659,7 +1659,7 @@
           <p:cNvPr id="5" name="Text Placeholder 4">
             <a:extLst>
               <a:ext uri="{FF2B5EF4-FFF2-40B4-BE49-F238E27FC236}">
-                <a16:creationId xmlns:a16="http://schemas.microsoft.com/office/drawing/2014/main" id="{FE6100C8-C215-8837-E94A-7A51D379FA7B}"/>
+                <a16:creationId xmlns:a16="http://schemas.microsoft.com/office/drawing/2014/main" id="{FF4E8526-0B3F-9354-9D3C-30B1564979ED}"/>
               </a:ext>
             </a:extLst>
           </p:cNvPr>
@@ -1730,7 +1730,7 @@
           <p:cNvPr id="6" name="Content Placeholder 5">
             <a:extLst>
               <a:ext uri="{FF2B5EF4-FFF2-40B4-BE49-F238E27FC236}">
-                <a16:creationId xmlns:a16="http://schemas.microsoft.com/office/drawing/2014/main" id="{824DAEA1-0C4A-1EDD-6CBF-F9A1AD53878E}"/>
+                <a16:creationId xmlns:a16="http://schemas.microsoft.com/office/drawing/2014/main" id="{D762372E-B17C-20DE-0F81-74DE296770DB}"/>
               </a:ext>
             </a:extLst>
           </p:cNvPr>
@@ -1792,7 +1792,7 @@
           <p:cNvPr id="7" name="Date Placeholder 6">
             <a:extLst>
               <a:ext uri="{FF2B5EF4-FFF2-40B4-BE49-F238E27FC236}">
-                <a16:creationId xmlns:a16="http://schemas.microsoft.com/office/drawing/2014/main" id="{F883DD6C-471F-61E7-11B9-DEAEAE0B17A7}"/>
+                <a16:creationId xmlns:a16="http://schemas.microsoft.com/office/drawing/2014/main" id="{30F050AE-FE27-3F0B-10AB-66E7B508E4A9}"/>
               </a:ext>
             </a:extLst>
           </p:cNvPr>
@@ -1808,7 +1808,7 @@
           <a:bodyPr/>
           <a:lstStyle/>
           <a:p>
-            <a:fld id="{3E5093B9-90E3-4789-AE9C-479084660FBB}" type="datetimeFigureOut">
+            <a:fld id="{4952CEEE-4057-484F-A4D6-1563321FC9E5}" type="datetimeFigureOut">
               <a:rPr lang="en-US" smtClean="0"/>
               <a:t>6/26/2026</a:t>
             </a:fld>
@@ -1821,7 +1821,7 @@
           <p:cNvPr id="8" name="Footer Placeholder 7">
             <a:extLst>
               <a:ext uri="{FF2B5EF4-FFF2-40B4-BE49-F238E27FC236}">
-                <a16:creationId xmlns:a16="http://schemas.microsoft.com/office/drawing/2014/main" id="{B7CDEB20-9274-4AF5-4489-4739EF6C3318}"/>
+                <a16:creationId xmlns:a16="http://schemas.microsoft.com/office/drawing/2014/main" id="{AC4C5A91-8FDE-834C-9496-59EADA1F159B}"/>
               </a:ext>
             </a:extLst>
           </p:cNvPr>
@@ -1846,7 +1846,7 @@
           <p:cNvPr id="9" name="Slide Number Placeholder 8">
             <a:extLst>
               <a:ext uri="{FF2B5EF4-FFF2-40B4-BE49-F238E27FC236}">
-                <a16:creationId xmlns:a16="http://schemas.microsoft.com/office/drawing/2014/main" id="{9F703EB5-B223-3D2B-5080-8324E040E186}"/>
+                <a16:creationId xmlns:a16="http://schemas.microsoft.com/office/drawing/2014/main" id="{4114C8DA-FD6A-FEDE-110B-80647EE3144E}"/>
               </a:ext>
             </a:extLst>
           </p:cNvPr>
@@ -1862,7 +1862,7 @@
           <a:bodyPr/>
           <a:lstStyle/>
           <a:p>
-            <a:fld id="{A6897E97-FCE4-4795-9D7F-F982D9319847}" type="slidenum">
+            <a:fld id="{99638845-3555-49A7-8B29-F1FDEDD11D6C}" type="slidenum">
               <a:rPr lang="en-US" smtClean="0"/>
               <a:t>‹#›</a:t>
             </a:fld>
@@ -1873,7 +1873,7 @@
     </p:spTree>
     <p:extLst>
       <p:ext uri="{BB962C8B-B14F-4D97-AF65-F5344CB8AC3E}">
-        <p14:creationId xmlns:p14="http://schemas.microsoft.com/office/powerpoint/2010/main" val="2823863010"/>
+        <p14:creationId xmlns:p14="http://schemas.microsoft.com/office/powerpoint/2010/main" val="3867383684"/>
       </p:ext>
     </p:extLst>
   </p:cSld>
@@ -1905,7 +1905,7 @@
           <p:cNvPr id="2" name="Title 1">
             <a:extLst>
               <a:ext uri="{FF2B5EF4-FFF2-40B4-BE49-F238E27FC236}">
-                <a16:creationId xmlns:a16="http://schemas.microsoft.com/office/drawing/2014/main" id="{41FDB825-761C-AD5C-D6FE-CA1C359B458C}"/>
+                <a16:creationId xmlns:a16="http://schemas.microsoft.com/office/drawing/2014/main" id="{30D85EB0-D71D-284E-0C07-0386732D42F9}"/>
               </a:ext>
             </a:extLst>
           </p:cNvPr>
@@ -1933,7 +1933,7 @@
           <p:cNvPr id="3" name="Date Placeholder 2">
             <a:extLst>
               <a:ext uri="{FF2B5EF4-FFF2-40B4-BE49-F238E27FC236}">
-                <a16:creationId xmlns:a16="http://schemas.microsoft.com/office/drawing/2014/main" id="{F7370008-62B4-70E7-BF1F-278CC7C3B04C}"/>
+                <a16:creationId xmlns:a16="http://schemas.microsoft.com/office/drawing/2014/main" id="{BBAA8224-BD2D-A884-334A-905042D7EAE2}"/>
               </a:ext>
             </a:extLst>
           </p:cNvPr>
@@ -1949,7 +1949,7 @@
           <a:bodyPr/>
           <a:lstStyle/>
           <a:p>
-            <a:fld id="{3E5093B9-90E3-4789-AE9C-479084660FBB}" type="datetimeFigureOut">
+            <a:fld id="{4952CEEE-4057-484F-A4D6-1563321FC9E5}" type="datetimeFigureOut">
               <a:rPr lang="en-US" smtClean="0"/>
               <a:t>6/26/2026</a:t>
             </a:fld>
@@ -1962,7 +1962,7 @@
           <p:cNvPr id="4" name="Footer Placeholder 3">
             <a:extLst>
               <a:ext uri="{FF2B5EF4-FFF2-40B4-BE49-F238E27FC236}">
-                <a16:creationId xmlns:a16="http://schemas.microsoft.com/office/drawing/2014/main" id="{B5198006-395B-14BD-963C-4AE8C919891F}"/>
+                <a16:creationId xmlns:a16="http://schemas.microsoft.com/office/drawing/2014/main" id="{7394ED94-3A3C-40B2-5E6B-CF4D6732E6C2}"/>
               </a:ext>
             </a:extLst>
           </p:cNvPr>
@@ -1987,7 +1987,7 @@
           <p:cNvPr id="5" name="Slide Number Placeholder 4">
             <a:extLst>
               <a:ext uri="{FF2B5EF4-FFF2-40B4-BE49-F238E27FC236}">
-                <a16:creationId xmlns:a16="http://schemas.microsoft.com/office/drawing/2014/main" id="{51EAB957-673C-C31E-0325-8C5460E9A621}"/>
+                <a16:creationId xmlns:a16="http://schemas.microsoft.com/office/drawing/2014/main" id="{B346A33C-DD21-50F4-DD71-73A4DEBFEB0D}"/>
               </a:ext>
             </a:extLst>
           </p:cNvPr>
@@ -2003,7 +2003,7 @@
           <a:bodyPr/>
           <a:lstStyle/>
           <a:p>
-            <a:fld id="{A6897E97-FCE4-4795-9D7F-F982D9319847}" type="slidenum">
+            <a:fld id="{99638845-3555-49A7-8B29-F1FDEDD11D6C}" type="slidenum">
               <a:rPr lang="en-US" smtClean="0"/>
               <a:t>‹#›</a:t>
             </a:fld>
@@ -2014,7 +2014,7 @@
     </p:spTree>
     <p:extLst>
       <p:ext uri="{BB962C8B-B14F-4D97-AF65-F5344CB8AC3E}">
-        <p14:creationId xmlns:p14="http://schemas.microsoft.com/office/powerpoint/2010/main" val="1450554543"/>
+        <p14:creationId xmlns:p14="http://schemas.microsoft.com/office/powerpoint/2010/main" val="4016390012"/>
       </p:ext>
     </p:extLst>
   </p:cSld>
@@ -2046,7 +2046,7 @@
           <p:cNvPr id="2" name="Date Placeholder 1">
             <a:extLst>
               <a:ext uri="{FF2B5EF4-FFF2-40B4-BE49-F238E27FC236}">
-                <a16:creationId xmlns:a16="http://schemas.microsoft.com/office/drawing/2014/main" id="{B2728C3A-189F-A6BD-6B70-005839549890}"/>
+                <a16:creationId xmlns:a16="http://schemas.microsoft.com/office/drawing/2014/main" id="{EBBE6F6F-A388-4E4E-DEB4-11AB4C68FC08}"/>
               </a:ext>
             </a:extLst>
           </p:cNvPr>
@@ -2062,7 +2062,7 @@
           <a:bodyPr/>
           <a:lstStyle/>
           <a:p>
-            <a:fld id="{3E5093B9-90E3-4789-AE9C-479084660FBB}" type="datetimeFigureOut">
+            <a:fld id="{4952CEEE-4057-484F-A4D6-1563321FC9E5}" type="datetimeFigureOut">
               <a:rPr lang="en-US" smtClean="0"/>
               <a:t>6/26/2026</a:t>
             </a:fld>
@@ -2075,7 +2075,7 @@
           <p:cNvPr id="3" name="Footer Placeholder 2">
             <a:extLst>
               <a:ext uri="{FF2B5EF4-FFF2-40B4-BE49-F238E27FC236}">
-                <a16:creationId xmlns:a16="http://schemas.microsoft.com/office/drawing/2014/main" id="{6284588A-0C51-EF86-4951-4D1342D1D9AA}"/>
+                <a16:creationId xmlns:a16="http://schemas.microsoft.com/office/drawing/2014/main" id="{90C8F1BF-314B-585A-E068-7B49B7015498}"/>
               </a:ext>
             </a:extLst>
           </p:cNvPr>
@@ -2100,7 +2100,7 @@
           <p:cNvPr id="4" name="Slide Number Placeholder 3">
             <a:extLst>
               <a:ext uri="{FF2B5EF4-FFF2-40B4-BE49-F238E27FC236}">
-                <a16:creationId xmlns:a16="http://schemas.microsoft.com/office/drawing/2014/main" id="{CDC6AB67-4461-A0E6-F53E-F7EFD92CCA6E}"/>
+                <a16:creationId xmlns:a16="http://schemas.microsoft.com/office/drawing/2014/main" id="{315CB7E0-5EC8-1B15-9A46-5A47E6735A96}"/>
               </a:ext>
             </a:extLst>
           </p:cNvPr>
@@ -2116,7 +2116,7 @@
           <a:bodyPr/>
           <a:lstStyle/>
           <a:p>
-            <a:fld id="{A6897E97-FCE4-4795-9D7F-F982D9319847}" type="slidenum">
+            <a:fld id="{99638845-3555-49A7-8B29-F1FDEDD11D6C}" type="slidenum">
               <a:rPr lang="en-US" smtClean="0"/>
               <a:t>‹#›</a:t>
             </a:fld>
@@ -2127,7 +2127,7 @@
     </p:spTree>
     <p:extLst>
       <p:ext uri="{BB962C8B-B14F-4D97-AF65-F5344CB8AC3E}">
-        <p14:creationId xmlns:p14="http://schemas.microsoft.com/office/powerpoint/2010/main" val="2770228459"/>
+        <p14:creationId xmlns:p14="http://schemas.microsoft.com/office/powerpoint/2010/main" val="501968097"/>
       </p:ext>
     </p:extLst>
   </p:cSld>
@@ -2159,7 +2159,7 @@
           <p:cNvPr id="2" name="Title 1">
             <a:extLst>
               <a:ext uri="{FF2B5EF4-FFF2-40B4-BE49-F238E27FC236}">
-                <a16:creationId xmlns:a16="http://schemas.microsoft.com/office/drawing/2014/main" id="{DBCB8363-0691-8C89-2AE8-3B6C85F55E1C}"/>
+                <a16:creationId xmlns:a16="http://schemas.microsoft.com/office/drawing/2014/main" id="{008CD79F-2EF1-119E-AC05-064BFBD0C71B}"/>
               </a:ext>
             </a:extLst>
           </p:cNvPr>
@@ -2196,7 +2196,7 @@
           <p:cNvPr id="3" name="Content Placeholder 2">
             <a:extLst>
               <a:ext uri="{FF2B5EF4-FFF2-40B4-BE49-F238E27FC236}">
-                <a16:creationId xmlns:a16="http://schemas.microsoft.com/office/drawing/2014/main" id="{AD5820E2-19FE-F3C0-11BE-5384B7DAFF9F}"/>
+                <a16:creationId xmlns:a16="http://schemas.microsoft.com/office/drawing/2014/main" id="{18F79C84-CE1E-FB09-A35A-8F8804F64F94}"/>
               </a:ext>
             </a:extLst>
           </p:cNvPr>
@@ -2286,7 +2286,7 @@
           <p:cNvPr id="4" name="Text Placeholder 3">
             <a:extLst>
               <a:ext uri="{FF2B5EF4-FFF2-40B4-BE49-F238E27FC236}">
-                <a16:creationId xmlns:a16="http://schemas.microsoft.com/office/drawing/2014/main" id="{DC37A7C0-DD46-99B1-71ED-B9F2E2D152E0}"/>
+                <a16:creationId xmlns:a16="http://schemas.microsoft.com/office/drawing/2014/main" id="{4F3ED196-ECD9-3A8B-C89A-D9EA8FA1AF83}"/>
               </a:ext>
             </a:extLst>
           </p:cNvPr>
@@ -2357,7 +2357,7 @@
           <p:cNvPr id="5" name="Date Placeholder 4">
             <a:extLst>
               <a:ext uri="{FF2B5EF4-FFF2-40B4-BE49-F238E27FC236}">
-                <a16:creationId xmlns:a16="http://schemas.microsoft.com/office/drawing/2014/main" id="{31C0909F-44F4-9D0E-8E88-3517C9D8778A}"/>
+                <a16:creationId xmlns:a16="http://schemas.microsoft.com/office/drawing/2014/main" id="{BEC63FA7-401D-C3F1-ECB3-47B1F4A30DB7}"/>
               </a:ext>
             </a:extLst>
           </p:cNvPr>
@@ -2373,7 +2373,7 @@
           <a:bodyPr/>
           <a:lstStyle/>
           <a:p>
-            <a:fld id="{3E5093B9-90E3-4789-AE9C-479084660FBB}" type="datetimeFigureOut">
+            <a:fld id="{4952CEEE-4057-484F-A4D6-1563321FC9E5}" type="datetimeFigureOut">
               <a:rPr lang="en-US" smtClean="0"/>
               <a:t>6/26/2026</a:t>
             </a:fld>
@@ -2386,7 +2386,7 @@
           <p:cNvPr id="6" name="Footer Placeholder 5">
             <a:extLst>
               <a:ext uri="{FF2B5EF4-FFF2-40B4-BE49-F238E27FC236}">
-                <a16:creationId xmlns:a16="http://schemas.microsoft.com/office/drawing/2014/main" id="{B9D33DE5-2DDF-5AAD-AE2D-5DF4F57DBF2C}"/>
+                <a16:creationId xmlns:a16="http://schemas.microsoft.com/office/drawing/2014/main" id="{AB1B890E-E551-3638-CCE0-48EE8913671E}"/>
               </a:ext>
             </a:extLst>
           </p:cNvPr>
@@ -2411,7 +2411,7 @@
           <p:cNvPr id="7" name="Slide Number Placeholder 6">
             <a:extLst>
               <a:ext uri="{FF2B5EF4-FFF2-40B4-BE49-F238E27FC236}">
-                <a16:creationId xmlns:a16="http://schemas.microsoft.com/office/drawing/2014/main" id="{BDEFD3BE-74C1-C5B1-64E3-4D8B083897B1}"/>
+                <a16:creationId xmlns:a16="http://schemas.microsoft.com/office/drawing/2014/main" id="{B6A1FD39-1D28-98E7-D580-8602FC9C12EA}"/>
               </a:ext>
             </a:extLst>
           </p:cNvPr>
@@ -2427,7 +2427,7 @@
           <a:bodyPr/>
           <a:lstStyle/>
           <a:p>
-            <a:fld id="{A6897E97-FCE4-4795-9D7F-F982D9319847}" type="slidenum">
+            <a:fld id="{99638845-3555-49A7-8B29-F1FDEDD11D6C}" type="slidenum">
               <a:rPr lang="en-US" smtClean="0"/>
               <a:t>‹#›</a:t>
             </a:fld>
@@ -2438,7 +2438,7 @@
     </p:spTree>
     <p:extLst>
       <p:ext uri="{BB962C8B-B14F-4D97-AF65-F5344CB8AC3E}">
-        <p14:creationId xmlns:p14="http://schemas.microsoft.com/office/powerpoint/2010/main" val="2470780650"/>
+        <p14:creationId xmlns:p14="http://schemas.microsoft.com/office/powerpoint/2010/main" val="1142472131"/>
       </p:ext>
     </p:extLst>
   </p:cSld>
@@ -2470,7 +2470,7 @@
           <p:cNvPr id="2" name="Title 1">
             <a:extLst>
               <a:ext uri="{FF2B5EF4-FFF2-40B4-BE49-F238E27FC236}">
-                <a16:creationId xmlns:a16="http://schemas.microsoft.com/office/drawing/2014/main" id="{325D31D1-78D0-5E6B-B188-6C07147FC20E}"/>
+                <a16:creationId xmlns:a16="http://schemas.microsoft.com/office/drawing/2014/main" id="{4A1CCB3D-9699-85E6-FC68-ED28C912237B}"/>
               </a:ext>
             </a:extLst>
           </p:cNvPr>
@@ -2507,7 +2507,7 @@
           <p:cNvPr id="3" name="Picture Placeholder 2">
             <a:extLst>
               <a:ext uri="{FF2B5EF4-FFF2-40B4-BE49-F238E27FC236}">
-                <a16:creationId xmlns:a16="http://schemas.microsoft.com/office/drawing/2014/main" id="{C71144DC-E877-BF40-B8DD-68616A8E3301}"/>
+                <a16:creationId xmlns:a16="http://schemas.microsoft.com/office/drawing/2014/main" id="{04D6BE43-DCC5-EBD3-D0E1-534BDFA3E159}"/>
               </a:ext>
             </a:extLst>
           </p:cNvPr>
@@ -2574,7 +2574,7 @@
           <p:cNvPr id="4" name="Text Placeholder 3">
             <a:extLst>
               <a:ext uri="{FF2B5EF4-FFF2-40B4-BE49-F238E27FC236}">
-                <a16:creationId xmlns:a16="http://schemas.microsoft.com/office/drawing/2014/main" id="{EE394404-45C3-4C81-D5C6-C7D9D926DFD2}"/>
+                <a16:creationId xmlns:a16="http://schemas.microsoft.com/office/drawing/2014/main" id="{E697B915-8277-6C11-FF10-98B88CB0A805}"/>
               </a:ext>
             </a:extLst>
           </p:cNvPr>
@@ -2645,7 +2645,7 @@
           <p:cNvPr id="5" name="Date Placeholder 4">
             <a:extLst>
               <a:ext uri="{FF2B5EF4-FFF2-40B4-BE49-F238E27FC236}">
-                <a16:creationId xmlns:a16="http://schemas.microsoft.com/office/drawing/2014/main" id="{D82E33D4-0C2A-DE08-0071-25C211F13A47}"/>
+                <a16:creationId xmlns:a16="http://schemas.microsoft.com/office/drawing/2014/main" id="{3F2DF3D9-B78D-0AD1-FCE4-E0ADE8701199}"/>
               </a:ext>
             </a:extLst>
           </p:cNvPr>
@@ -2661,7 +2661,7 @@
           <a:bodyPr/>
           <a:lstStyle/>
           <a:p>
-            <a:fld id="{3E5093B9-90E3-4789-AE9C-479084660FBB}" type="datetimeFigureOut">
+            <a:fld id="{4952CEEE-4057-484F-A4D6-1563321FC9E5}" type="datetimeFigureOut">
               <a:rPr lang="en-US" smtClean="0"/>
               <a:t>6/26/2026</a:t>
             </a:fld>
@@ -2674,7 +2674,7 @@
           <p:cNvPr id="6" name="Footer Placeholder 5">
             <a:extLst>
               <a:ext uri="{FF2B5EF4-FFF2-40B4-BE49-F238E27FC236}">
-                <a16:creationId xmlns:a16="http://schemas.microsoft.com/office/drawing/2014/main" id="{8B8A728D-5AE1-A341-2334-FF07E65766C6}"/>
+                <a16:creationId xmlns:a16="http://schemas.microsoft.com/office/drawing/2014/main" id="{9CC3BA1D-675F-ED73-1E4F-749F95CBDC85}"/>
               </a:ext>
             </a:extLst>
           </p:cNvPr>
@@ -2699,7 +2699,7 @@
           <p:cNvPr id="7" name="Slide Number Placeholder 6">
             <a:extLst>
               <a:ext uri="{FF2B5EF4-FFF2-40B4-BE49-F238E27FC236}">
-                <a16:creationId xmlns:a16="http://schemas.microsoft.com/office/drawing/2014/main" id="{A365D127-A30B-41BF-7A7C-EA5421E83C99}"/>
+                <a16:creationId xmlns:a16="http://schemas.microsoft.com/office/drawing/2014/main" id="{660B3663-22FC-D3BE-38A3-CD5987984E74}"/>
               </a:ext>
             </a:extLst>
           </p:cNvPr>
@@ -2715,7 +2715,7 @@
           <a:bodyPr/>
           <a:lstStyle/>
           <a:p>
-            <a:fld id="{A6897E97-FCE4-4795-9D7F-F982D9319847}" type="slidenum">
+            <a:fld id="{99638845-3555-49A7-8B29-F1FDEDD11D6C}" type="slidenum">
               <a:rPr lang="en-US" smtClean="0"/>
               <a:t>‹#›</a:t>
             </a:fld>
@@ -2726,7 +2726,7 @@
     </p:spTree>
     <p:extLst>
       <p:ext uri="{BB962C8B-B14F-4D97-AF65-F5344CB8AC3E}">
-        <p14:creationId xmlns:p14="http://schemas.microsoft.com/office/powerpoint/2010/main" val="1883350664"/>
+        <p14:creationId xmlns:p14="http://schemas.microsoft.com/office/powerpoint/2010/main" val="1517262959"/>
       </p:ext>
     </p:extLst>
   </p:cSld>
@@ -2763,7 +2763,7 @@
           <p:cNvPr id="2" name="Title Placeholder 1">
             <a:extLst>
               <a:ext uri="{FF2B5EF4-FFF2-40B4-BE49-F238E27FC236}">
-                <a16:creationId xmlns:a16="http://schemas.microsoft.com/office/drawing/2014/main" id="{C9436E51-06D4-F62E-2423-4CC8DEDC23FA}"/>
+                <a16:creationId xmlns:a16="http://schemas.microsoft.com/office/drawing/2014/main" id="{78211262-4EF0-5E5A-90C6-43355D871E6A}"/>
               </a:ext>
             </a:extLst>
           </p:cNvPr>
@@ -2801,7 +2801,7 @@
           <p:cNvPr id="3" name="Text Placeholder 2">
             <a:extLst>
               <a:ext uri="{FF2B5EF4-FFF2-40B4-BE49-F238E27FC236}">
-                <a16:creationId xmlns:a16="http://schemas.microsoft.com/office/drawing/2014/main" id="{18DB141C-7FE6-F5E6-1FC5-E33639511D45}"/>
+                <a16:creationId xmlns:a16="http://schemas.microsoft.com/office/drawing/2014/main" id="{F2936940-6101-151E-D346-8C47BDF2889E}"/>
               </a:ext>
             </a:extLst>
           </p:cNvPr>
@@ -2868,7 +2868,7 @@
           <p:cNvPr id="4" name="Date Placeholder 3">
             <a:extLst>
               <a:ext uri="{FF2B5EF4-FFF2-40B4-BE49-F238E27FC236}">
-                <a16:creationId xmlns:a16="http://schemas.microsoft.com/office/drawing/2014/main" id="{8207CE03-FA58-1597-564B-87AE9DC84F03}"/>
+                <a16:creationId xmlns:a16="http://schemas.microsoft.com/office/drawing/2014/main" id="{7B3F93D7-0034-CF85-1AF9-2145AC412C4A}"/>
               </a:ext>
             </a:extLst>
           </p:cNvPr>
@@ -2902,7 +2902,7 @@
             </a:lvl1pPr>
           </a:lstStyle>
           <a:p>
-            <a:fld id="{3E5093B9-90E3-4789-AE9C-479084660FBB}" type="datetimeFigureOut">
+            <a:fld id="{4952CEEE-4057-484F-A4D6-1563321FC9E5}" type="datetimeFigureOut">
               <a:rPr lang="en-US" smtClean="0"/>
               <a:t>6/26/2026</a:t>
             </a:fld>
@@ -2915,7 +2915,7 @@
           <p:cNvPr id="5" name="Footer Placeholder 4">
             <a:extLst>
               <a:ext uri="{FF2B5EF4-FFF2-40B4-BE49-F238E27FC236}">
-                <a16:creationId xmlns:a16="http://schemas.microsoft.com/office/drawing/2014/main" id="{2716D57C-235D-F766-ACA8-92EC8A551BA5}"/>
+                <a16:creationId xmlns:a16="http://schemas.microsoft.com/office/drawing/2014/main" id="{ED63626E-8ACF-034B-1102-E1F3C830723A}"/>
               </a:ext>
             </a:extLst>
           </p:cNvPr>
@@ -2958,7 +2958,7 @@
           <p:cNvPr id="6" name="Slide Number Placeholder 5">
             <a:extLst>
               <a:ext uri="{FF2B5EF4-FFF2-40B4-BE49-F238E27FC236}">
-                <a16:creationId xmlns:a16="http://schemas.microsoft.com/office/drawing/2014/main" id="{5D83BAAE-127A-4780-342B-3BC2E9DEB42E}"/>
+                <a16:creationId xmlns:a16="http://schemas.microsoft.com/office/drawing/2014/main" id="{08A18F68-EF38-8AB3-D954-B5E29C7C0A11}"/>
               </a:ext>
             </a:extLst>
           </p:cNvPr>
@@ -2992,7 +2992,7 @@
             </a:lvl1pPr>
           </a:lstStyle>
           <a:p>
-            <a:fld id="{A6897E97-FCE4-4795-9D7F-F982D9319847}" type="slidenum">
+            <a:fld id="{99638845-3555-49A7-8B29-F1FDEDD11D6C}" type="slidenum">
               <a:rPr lang="en-US" smtClean="0"/>
               <a:t>‹#›</a:t>
             </a:fld>
@@ -3003,7 +3003,7 @@
     </p:spTree>
     <p:extLst>
       <p:ext uri="{BB962C8B-B14F-4D97-AF65-F5344CB8AC3E}">
-        <p14:creationId xmlns:p14="http://schemas.microsoft.com/office/powerpoint/2010/main" val="1049885693"/>
+        <p14:creationId xmlns:p14="http://schemas.microsoft.com/office/powerpoint/2010/main" val="3778203872"/>
       </p:ext>
     </p:extLst>
   </p:cSld>
@@ -3326,7 +3326,7 @@
           <p:cNvPr id="2" name="ShadowRect">
             <a:extLst>
               <a:ext uri="{FF2B5EF4-FFF2-40B4-BE49-F238E27FC236}">
-                <a16:creationId xmlns:a16="http://schemas.microsoft.com/office/drawing/2014/main" id="{630AB674-B92B-F993-03D5-14FFC5B88A9E}"/>
+                <a16:creationId xmlns:a16="http://schemas.microsoft.com/office/drawing/2014/main" id="{02E2EE2F-1F9F-A32C-5C35-5796067C87D0}"/>
               </a:ext>
             </a:extLst>
           </p:cNvPr>
@@ -3389,7 +3389,7 @@
           <p:cNvPr id="3" name="GlowEllipse">
             <a:extLst>
               <a:ext uri="{FF2B5EF4-FFF2-40B4-BE49-F238E27FC236}">
-                <a16:creationId xmlns:a16="http://schemas.microsoft.com/office/drawing/2014/main" id="{58D180B6-45B2-96E9-789D-7FE72134ADA8}"/>
+                <a16:creationId xmlns:a16="http://schemas.microsoft.com/office/drawing/2014/main" id="{8F69BC64-C556-18F8-FC05-8272BF71762D}"/>
               </a:ext>
             </a:extLst>
           </p:cNvPr>
@@ -3452,7 +3452,7 @@
           <p:cNvPr id="4" name="SoftRect">
             <a:extLst>
               <a:ext uri="{FF2B5EF4-FFF2-40B4-BE49-F238E27FC236}">
-                <a16:creationId xmlns:a16="http://schemas.microsoft.com/office/drawing/2014/main" id="{C14313C2-21E9-66F1-B911-A41B78B9D447}"/>
+                <a16:creationId xmlns:a16="http://schemas.microsoft.com/office/drawing/2014/main" id="{4E163706-0FFB-00B0-F00B-EBE8BEB03005}"/>
               </a:ext>
             </a:extLst>
           </p:cNvPr>
@@ -3511,7 +3511,7 @@
           <p:cNvPr id="5" name="TextBox 4">
             <a:extLst>
               <a:ext uri="{FF2B5EF4-FFF2-40B4-BE49-F238E27FC236}">
-                <a16:creationId xmlns:a16="http://schemas.microsoft.com/office/drawing/2014/main" id="{64B40AEA-517E-983E-FD96-D118ABF0ECEB}"/>
+                <a16:creationId xmlns:a16="http://schemas.microsoft.com/office/drawing/2014/main" id="{A51AC43C-4141-D72E-F4B2-F51E34ACA418}"/>
               </a:ext>
             </a:extLst>
           </p:cNvPr>
@@ -3544,7 +3544,7 @@
     </p:spTree>
     <p:extLst>
       <p:ext uri="{BB962C8B-B14F-4D97-AF65-F5344CB8AC3E}">
-        <p14:creationId xmlns:p14="http://schemas.microsoft.com/office/powerpoint/2010/main" val="3795444200"/>
+        <p14:creationId xmlns:p14="http://schemas.microsoft.com/office/powerpoint/2010/main" val="2333522788"/>
       </p:ext>
     </p:extLst>
   </p:cSld>
